--- a/docs_en/img/01/img.pptx
+++ b/docs_en/img/01/img.pptx
@@ -4,9 +4,13 @@
   <p:sldMasterIdLst>
     <p:sldMasterId id="2147483672" r:id="rId1"/>
   </p:sldMasterIdLst>
+  <p:notesMasterIdLst>
+    <p:notesMasterId r:id="rId5"/>
+  </p:notesMasterIdLst>
   <p:sldIdLst>
     <p:sldId id="258" r:id="rId2"/>
     <p:sldId id="257" r:id="rId3"/>
+    <p:sldId id="259" r:id="rId4"/>
   </p:sldIdLst>
   <p:sldSz cx="12192000" cy="12192000"/>
   <p:notesSz cx="6858000" cy="9144000"/>
@@ -4032,6 +4036,471 @@
 </pc:chgInfo>
 </file>
 
+<file path=ppt/notesMasters/notesMaster1.xml><?xml version="1.0" encoding="utf-8"?>
+<p:notesMaster xmlns:a="http://schemas.openxmlformats.org/drawingml/2006/main" xmlns:r="http://schemas.openxmlformats.org/officeDocument/2006/relationships" xmlns:p="http://schemas.openxmlformats.org/presentationml/2006/main">
+  <p:cSld>
+    <p:bg>
+      <p:bgRef idx="1001">
+        <a:schemeClr val="bg1"/>
+      </p:bgRef>
+    </p:bg>
+    <p:spTree>
+      <p:nvGrpSpPr>
+        <p:cNvPr id="1" name=""/>
+        <p:cNvGrpSpPr/>
+        <p:nvPr/>
+      </p:nvGrpSpPr>
+      <p:grpSpPr>
+        <a:xfrm>
+          <a:off x="0" y="0"/>
+          <a:ext cx="0" cy="0"/>
+          <a:chOff x="0" y="0"/>
+          <a:chExt cx="0" cy="0"/>
+        </a:xfrm>
+      </p:grpSpPr>
+      <p:sp>
+        <p:nvSpPr>
+          <p:cNvPr id="2" name="ヘッダー プレースホルダー 1"/>
+          <p:cNvSpPr>
+            <a:spLocks noGrp="1"/>
+          </p:cNvSpPr>
+          <p:nvPr>
+            <p:ph type="hdr" sz="quarter"/>
+          </p:nvPr>
+        </p:nvSpPr>
+        <p:spPr>
+          <a:xfrm>
+            <a:off x="0" y="0"/>
+            <a:ext cx="2971800" cy="458788"/>
+          </a:xfrm>
+          <a:prstGeom prst="rect">
+            <a:avLst/>
+          </a:prstGeom>
+        </p:spPr>
+        <p:txBody>
+          <a:bodyPr vert="horz" lIns="91440" tIns="45720" rIns="91440" bIns="45720" rtlCol="0"/>
+          <a:lstStyle>
+            <a:lvl1pPr algn="l">
+              <a:defRPr sz="1200"/>
+            </a:lvl1pPr>
+          </a:lstStyle>
+          <a:p>
+            <a:endParaRPr kumimoji="1" lang="ja-JP" altLang="en-US"/>
+          </a:p>
+        </p:txBody>
+      </p:sp>
+      <p:sp>
+        <p:nvSpPr>
+          <p:cNvPr id="3" name="日付プレースホルダー 2"/>
+          <p:cNvSpPr>
+            <a:spLocks noGrp="1"/>
+          </p:cNvSpPr>
+          <p:nvPr>
+            <p:ph type="dt" idx="1"/>
+          </p:nvPr>
+        </p:nvSpPr>
+        <p:spPr>
+          <a:xfrm>
+            <a:off x="3884613" y="0"/>
+            <a:ext cx="2971800" cy="458788"/>
+          </a:xfrm>
+          <a:prstGeom prst="rect">
+            <a:avLst/>
+          </a:prstGeom>
+        </p:spPr>
+        <p:txBody>
+          <a:bodyPr vert="horz" lIns="91440" tIns="45720" rIns="91440" bIns="45720" rtlCol="0"/>
+          <a:lstStyle>
+            <a:lvl1pPr algn="r">
+              <a:defRPr sz="1200"/>
+            </a:lvl1pPr>
+          </a:lstStyle>
+          <a:p>
+            <a:fld id="{7415EFE6-1BA7-364B-AB0B-E7CAF2BB87C4}" type="datetimeFigureOut">
+              <a:rPr kumimoji="1" lang="ja-JP" altLang="en-US" smtClean="0"/>
+              <a:t>2026/7/27</a:t>
+            </a:fld>
+            <a:endParaRPr kumimoji="1" lang="ja-JP" altLang="en-US"/>
+          </a:p>
+        </p:txBody>
+      </p:sp>
+      <p:sp>
+        <p:nvSpPr>
+          <p:cNvPr id="4" name="スライド イメージ プレースホルダー 3"/>
+          <p:cNvSpPr>
+            <a:spLocks noGrp="1" noRot="1" noChangeAspect="1"/>
+          </p:cNvSpPr>
+          <p:nvPr>
+            <p:ph type="sldImg" idx="2"/>
+          </p:nvPr>
+        </p:nvSpPr>
+        <p:spPr>
+          <a:xfrm>
+            <a:off x="1885950" y="1143000"/>
+            <a:ext cx="3086100" cy="3086100"/>
+          </a:xfrm>
+          <a:prstGeom prst="rect">
+            <a:avLst/>
+          </a:prstGeom>
+          <a:noFill/>
+          <a:ln w="12700">
+            <a:solidFill>
+              <a:prstClr val="black"/>
+            </a:solidFill>
+          </a:ln>
+        </p:spPr>
+        <p:txBody>
+          <a:bodyPr vert="horz" lIns="91440" tIns="45720" rIns="91440" bIns="45720" rtlCol="0" anchor="ctr"/>
+          <a:lstStyle/>
+          <a:p>
+            <a:endParaRPr lang="ja-JP" altLang="en-US"/>
+          </a:p>
+        </p:txBody>
+      </p:sp>
+      <p:sp>
+        <p:nvSpPr>
+          <p:cNvPr id="5" name="ノート プレースホルダー 4"/>
+          <p:cNvSpPr>
+            <a:spLocks noGrp="1"/>
+          </p:cNvSpPr>
+          <p:nvPr>
+            <p:ph type="body" sz="quarter" idx="3"/>
+          </p:nvPr>
+        </p:nvSpPr>
+        <p:spPr>
+          <a:xfrm>
+            <a:off x="685800" y="4400550"/>
+            <a:ext cx="5486400" cy="3600450"/>
+          </a:xfrm>
+          <a:prstGeom prst="rect">
+            <a:avLst/>
+          </a:prstGeom>
+        </p:spPr>
+        <p:txBody>
+          <a:bodyPr vert="horz" lIns="91440" tIns="45720" rIns="91440" bIns="45720" rtlCol="0"/>
+          <a:lstStyle/>
+          <a:p>
+            <a:pPr lvl="0"/>
+            <a:r>
+              <a:rPr kumimoji="1" lang="ja-JP" altLang="en-US"/>
+              <a:t>マスター テキストの書式設定</a:t>
+            </a:r>
+          </a:p>
+          <a:p>
+            <a:pPr lvl="1"/>
+            <a:r>
+              <a:rPr kumimoji="1" lang="ja-JP" altLang="en-US"/>
+              <a:t>第 </a:t>
+            </a:r>
+            <a:r>
+              <a:rPr kumimoji="1" lang="en-US" altLang="ja-JP"/>
+              <a:t>2 </a:t>
+            </a:r>
+            <a:r>
+              <a:rPr kumimoji="1" lang="ja-JP" altLang="en-US"/>
+              <a:t>レベル</a:t>
+            </a:r>
+          </a:p>
+          <a:p>
+            <a:pPr lvl="2"/>
+            <a:r>
+              <a:rPr kumimoji="1" lang="ja-JP" altLang="en-US"/>
+              <a:t>第 </a:t>
+            </a:r>
+            <a:r>
+              <a:rPr kumimoji="1" lang="en-US" altLang="ja-JP"/>
+              <a:t>3 </a:t>
+            </a:r>
+            <a:r>
+              <a:rPr kumimoji="1" lang="ja-JP" altLang="en-US"/>
+              <a:t>レベル</a:t>
+            </a:r>
+          </a:p>
+          <a:p>
+            <a:pPr lvl="3"/>
+            <a:r>
+              <a:rPr kumimoji="1" lang="ja-JP" altLang="en-US"/>
+              <a:t>第 </a:t>
+            </a:r>
+            <a:r>
+              <a:rPr kumimoji="1" lang="en-US" altLang="ja-JP"/>
+              <a:t>4 </a:t>
+            </a:r>
+            <a:r>
+              <a:rPr kumimoji="1" lang="ja-JP" altLang="en-US"/>
+              <a:t>レベル</a:t>
+            </a:r>
+          </a:p>
+          <a:p>
+            <a:pPr lvl="4"/>
+            <a:r>
+              <a:rPr kumimoji="1" lang="ja-JP" altLang="en-US"/>
+              <a:t>第 </a:t>
+            </a:r>
+            <a:r>
+              <a:rPr kumimoji="1" lang="en-US" altLang="ja-JP"/>
+              <a:t>5 </a:t>
+            </a:r>
+            <a:r>
+              <a:rPr kumimoji="1" lang="ja-JP" altLang="en-US"/>
+              <a:t>レベル</a:t>
+            </a:r>
+          </a:p>
+        </p:txBody>
+      </p:sp>
+      <p:sp>
+        <p:nvSpPr>
+          <p:cNvPr id="6" name="フッター プレースホルダー 5"/>
+          <p:cNvSpPr>
+            <a:spLocks noGrp="1"/>
+          </p:cNvSpPr>
+          <p:nvPr>
+            <p:ph type="ftr" sz="quarter" idx="4"/>
+          </p:nvPr>
+        </p:nvSpPr>
+        <p:spPr>
+          <a:xfrm>
+            <a:off x="0" y="8685213"/>
+            <a:ext cx="2971800" cy="458787"/>
+          </a:xfrm>
+          <a:prstGeom prst="rect">
+            <a:avLst/>
+          </a:prstGeom>
+        </p:spPr>
+        <p:txBody>
+          <a:bodyPr vert="horz" lIns="91440" tIns="45720" rIns="91440" bIns="45720" rtlCol="0" anchor="b"/>
+          <a:lstStyle>
+            <a:lvl1pPr algn="l">
+              <a:defRPr sz="1200"/>
+            </a:lvl1pPr>
+          </a:lstStyle>
+          <a:p>
+            <a:endParaRPr kumimoji="1" lang="ja-JP" altLang="en-US"/>
+          </a:p>
+        </p:txBody>
+      </p:sp>
+      <p:sp>
+        <p:nvSpPr>
+          <p:cNvPr id="7" name="スライド番号プレースホルダー 6"/>
+          <p:cNvSpPr>
+            <a:spLocks noGrp="1"/>
+          </p:cNvSpPr>
+          <p:nvPr>
+            <p:ph type="sldNum" sz="quarter" idx="5"/>
+          </p:nvPr>
+        </p:nvSpPr>
+        <p:spPr>
+          <a:xfrm>
+            <a:off x="3884613" y="8685213"/>
+            <a:ext cx="2971800" cy="458787"/>
+          </a:xfrm>
+          <a:prstGeom prst="rect">
+            <a:avLst/>
+          </a:prstGeom>
+        </p:spPr>
+        <p:txBody>
+          <a:bodyPr vert="horz" lIns="91440" tIns="45720" rIns="91440" bIns="45720" rtlCol="0" anchor="b"/>
+          <a:lstStyle>
+            <a:lvl1pPr algn="r">
+              <a:defRPr sz="1200"/>
+            </a:lvl1pPr>
+          </a:lstStyle>
+          <a:p>
+            <a:fld id="{8EB47E65-B5AD-B340-A496-0BE2B227AB52}" type="slidenum">
+              <a:rPr kumimoji="1" lang="ja-JP" altLang="en-US" smtClean="0"/>
+              <a:t>‹#›</a:t>
+            </a:fld>
+            <a:endParaRPr kumimoji="1" lang="ja-JP" altLang="en-US"/>
+          </a:p>
+        </p:txBody>
+      </p:sp>
+    </p:spTree>
+    <p:extLst>
+      <p:ext uri="{BB962C8B-B14F-4D97-AF65-F5344CB8AC3E}">
+        <p14:creationId xmlns:p14="http://schemas.microsoft.com/office/powerpoint/2010/main" val="1220285703"/>
+      </p:ext>
+    </p:extLst>
+  </p:cSld>
+  <p:clrMap bg1="lt1" tx1="dk1" bg2="lt2" tx2="dk2" accent1="accent1" accent2="accent2" accent3="accent3" accent4="accent4" accent5="accent5" accent6="accent6" hlink="hlink" folHlink="folHlink"/>
+  <p:notesStyle>
+    <a:lvl1pPr marL="0" algn="l" defTabSz="914400" rtl="0" eaLnBrk="1" latinLnBrk="0" hangingPunct="1">
+      <a:defRPr kumimoji="1" sz="1200" kern="1200">
+        <a:solidFill>
+          <a:schemeClr val="tx1"/>
+        </a:solidFill>
+        <a:latin typeface="+mn-lt"/>
+        <a:ea typeface="+mn-ea"/>
+        <a:cs typeface="+mn-cs"/>
+      </a:defRPr>
+    </a:lvl1pPr>
+    <a:lvl2pPr marL="457200" algn="l" defTabSz="914400" rtl="0" eaLnBrk="1" latinLnBrk="0" hangingPunct="1">
+      <a:defRPr kumimoji="1" sz="1200" kern="1200">
+        <a:solidFill>
+          <a:schemeClr val="tx1"/>
+        </a:solidFill>
+        <a:latin typeface="+mn-lt"/>
+        <a:ea typeface="+mn-ea"/>
+        <a:cs typeface="+mn-cs"/>
+      </a:defRPr>
+    </a:lvl2pPr>
+    <a:lvl3pPr marL="914400" algn="l" defTabSz="914400" rtl="0" eaLnBrk="1" latinLnBrk="0" hangingPunct="1">
+      <a:defRPr kumimoji="1" sz="1200" kern="1200">
+        <a:solidFill>
+          <a:schemeClr val="tx1"/>
+        </a:solidFill>
+        <a:latin typeface="+mn-lt"/>
+        <a:ea typeface="+mn-ea"/>
+        <a:cs typeface="+mn-cs"/>
+      </a:defRPr>
+    </a:lvl3pPr>
+    <a:lvl4pPr marL="1371600" algn="l" defTabSz="914400" rtl="0" eaLnBrk="1" latinLnBrk="0" hangingPunct="1">
+      <a:defRPr kumimoji="1" sz="1200" kern="1200">
+        <a:solidFill>
+          <a:schemeClr val="tx1"/>
+        </a:solidFill>
+        <a:latin typeface="+mn-lt"/>
+        <a:ea typeface="+mn-ea"/>
+        <a:cs typeface="+mn-cs"/>
+      </a:defRPr>
+    </a:lvl4pPr>
+    <a:lvl5pPr marL="1828800" algn="l" defTabSz="914400" rtl="0" eaLnBrk="1" latinLnBrk="0" hangingPunct="1">
+      <a:defRPr kumimoji="1" sz="1200" kern="1200">
+        <a:solidFill>
+          <a:schemeClr val="tx1"/>
+        </a:solidFill>
+        <a:latin typeface="+mn-lt"/>
+        <a:ea typeface="+mn-ea"/>
+        <a:cs typeface="+mn-cs"/>
+      </a:defRPr>
+    </a:lvl5pPr>
+    <a:lvl6pPr marL="2286000" algn="l" defTabSz="914400" rtl="0" eaLnBrk="1" latinLnBrk="0" hangingPunct="1">
+      <a:defRPr kumimoji="1" sz="1200" kern="1200">
+        <a:solidFill>
+          <a:schemeClr val="tx1"/>
+        </a:solidFill>
+        <a:latin typeface="+mn-lt"/>
+        <a:ea typeface="+mn-ea"/>
+        <a:cs typeface="+mn-cs"/>
+      </a:defRPr>
+    </a:lvl6pPr>
+    <a:lvl7pPr marL="2743200" algn="l" defTabSz="914400" rtl="0" eaLnBrk="1" latinLnBrk="0" hangingPunct="1">
+      <a:defRPr kumimoji="1" sz="1200" kern="1200">
+        <a:solidFill>
+          <a:schemeClr val="tx1"/>
+        </a:solidFill>
+        <a:latin typeface="+mn-lt"/>
+        <a:ea typeface="+mn-ea"/>
+        <a:cs typeface="+mn-cs"/>
+      </a:defRPr>
+    </a:lvl7pPr>
+    <a:lvl8pPr marL="3200400" algn="l" defTabSz="914400" rtl="0" eaLnBrk="1" latinLnBrk="0" hangingPunct="1">
+      <a:defRPr kumimoji="1" sz="1200" kern="1200">
+        <a:solidFill>
+          <a:schemeClr val="tx1"/>
+        </a:solidFill>
+        <a:latin typeface="+mn-lt"/>
+        <a:ea typeface="+mn-ea"/>
+        <a:cs typeface="+mn-cs"/>
+      </a:defRPr>
+    </a:lvl8pPr>
+    <a:lvl9pPr marL="3657600" algn="l" defTabSz="914400" rtl="0" eaLnBrk="1" latinLnBrk="0" hangingPunct="1">
+      <a:defRPr kumimoji="1" sz="1200" kern="1200">
+        <a:solidFill>
+          <a:schemeClr val="tx1"/>
+        </a:solidFill>
+        <a:latin typeface="+mn-lt"/>
+        <a:ea typeface="+mn-ea"/>
+        <a:cs typeface="+mn-cs"/>
+      </a:defRPr>
+    </a:lvl9pPr>
+  </p:notesStyle>
+</p:notesMaster>
+</file>
+
+<file path=ppt/notesSlides/notesSlide1.xml><?xml version="1.0" encoding="utf-8"?>
+<p:notes xmlns:a="http://schemas.openxmlformats.org/drawingml/2006/main" xmlns:r="http://schemas.openxmlformats.org/officeDocument/2006/relationships" xmlns:p="http://schemas.openxmlformats.org/presentationml/2006/main">
+  <p:cSld>
+    <p:spTree>
+      <p:nvGrpSpPr>
+        <p:cNvPr id="1" name=""/>
+        <p:cNvGrpSpPr/>
+        <p:nvPr/>
+      </p:nvGrpSpPr>
+      <p:grpSpPr>
+        <a:xfrm>
+          <a:off x="0" y="0"/>
+          <a:ext cx="0" cy="0"/>
+          <a:chOff x="0" y="0"/>
+          <a:chExt cx="0" cy="0"/>
+        </a:xfrm>
+      </p:grpSpPr>
+      <p:sp>
+        <p:nvSpPr>
+          <p:cNvPr id="2" name="スライド イメージ プレースホルダー 1"/>
+          <p:cNvSpPr>
+            <a:spLocks noGrp="1" noRot="1" noChangeAspect="1"/>
+          </p:cNvSpPr>
+          <p:nvPr>
+            <p:ph type="sldImg"/>
+          </p:nvPr>
+        </p:nvSpPr>
+        <p:spPr/>
+      </p:sp>
+      <p:sp>
+        <p:nvSpPr>
+          <p:cNvPr id="3" name="ノート プレースホルダー 2"/>
+          <p:cNvSpPr>
+            <a:spLocks noGrp="1"/>
+          </p:cNvSpPr>
+          <p:nvPr>
+            <p:ph type="body" idx="1"/>
+          </p:nvPr>
+        </p:nvSpPr>
+        <p:spPr/>
+        <p:txBody>
+          <a:bodyPr/>
+          <a:lstStyle/>
+          <a:p>
+            <a:endParaRPr kumimoji="1" lang="ja-JP" altLang="en-US"/>
+          </a:p>
+        </p:txBody>
+      </p:sp>
+      <p:sp>
+        <p:nvSpPr>
+          <p:cNvPr id="4" name="スライド番号プレースホルダー 3"/>
+          <p:cNvSpPr>
+            <a:spLocks noGrp="1"/>
+          </p:cNvSpPr>
+          <p:nvPr>
+            <p:ph type="sldNum" sz="quarter" idx="5"/>
+          </p:nvPr>
+        </p:nvSpPr>
+        <p:spPr/>
+        <p:txBody>
+          <a:bodyPr/>
+          <a:lstStyle/>
+          <a:p>
+            <a:fld id="{8EB47E65-B5AD-B340-A496-0BE2B227AB52}" type="slidenum">
+              <a:rPr kumimoji="1" lang="ja-JP" altLang="en-US" smtClean="0"/>
+              <a:t>3</a:t>
+            </a:fld>
+            <a:endParaRPr kumimoji="1" lang="ja-JP" altLang="en-US"/>
+          </a:p>
+        </p:txBody>
+      </p:sp>
+    </p:spTree>
+    <p:extLst>
+      <p:ext uri="{BB962C8B-B14F-4D97-AF65-F5344CB8AC3E}">
+        <p14:creationId xmlns:p14="http://schemas.microsoft.com/office/powerpoint/2010/main" val="3878310950"/>
+      </p:ext>
+    </p:extLst>
+  </p:cSld>
+  <p:clrMapOvr>
+    <a:masterClrMapping/>
+  </p:clrMapOvr>
+</p:notes>
+</file>
+
 <file path=ppt/slideLayouts/slideLayout1.xml><?xml version="1.0" encoding="utf-8"?>
 <p:sldLayout xmlns:a="http://schemas.openxmlformats.org/drawingml/2006/main" xmlns:r="http://schemas.openxmlformats.org/officeDocument/2006/relationships" xmlns:p="http://schemas.openxmlformats.org/presentationml/2006/main" type="title" preserve="1">
   <p:cSld name="タイトル スライド">
@@ -4163,7 +4632,7 @@
           <a:p>
             <a:fld id="{08796073-9333-4BA1-BF77-342F3BE891B4}" type="datetimeFigureOut">
               <a:rPr kumimoji="1" lang="ja-JP" altLang="en-US" smtClean="0"/>
-              <a:t>2023/10/17</a:t>
+              <a:t>2026/7/27</a:t>
             </a:fld>
             <a:endParaRPr kumimoji="1" lang="ja-JP" altLang="en-US"/>
           </a:p>
@@ -4365,7 +4834,7 @@
           <a:p>
             <a:fld id="{08796073-9333-4BA1-BF77-342F3BE891B4}" type="datetimeFigureOut">
               <a:rPr kumimoji="1" lang="ja-JP" altLang="en-US" smtClean="0"/>
-              <a:t>2023/10/17</a:t>
+              <a:t>2026/7/27</a:t>
             </a:fld>
             <a:endParaRPr kumimoji="1" lang="ja-JP" altLang="en-US"/>
           </a:p>
@@ -4577,7 +5046,7 @@
           <a:p>
             <a:fld id="{08796073-9333-4BA1-BF77-342F3BE891B4}" type="datetimeFigureOut">
               <a:rPr kumimoji="1" lang="ja-JP" altLang="en-US" smtClean="0"/>
-              <a:t>2023/10/17</a:t>
+              <a:t>2026/7/27</a:t>
             </a:fld>
             <a:endParaRPr kumimoji="1" lang="ja-JP" altLang="en-US"/>
           </a:p>
@@ -4779,7 +5248,7 @@
           <a:p>
             <a:fld id="{08796073-9333-4BA1-BF77-342F3BE891B4}" type="datetimeFigureOut">
               <a:rPr kumimoji="1" lang="ja-JP" altLang="en-US" smtClean="0"/>
-              <a:t>2023/10/17</a:t>
+              <a:t>2026/7/27</a:t>
             </a:fld>
             <a:endParaRPr kumimoji="1" lang="ja-JP" altLang="en-US"/>
           </a:p>
@@ -5023,7 +5492,7 @@
           <a:p>
             <a:fld id="{08796073-9333-4BA1-BF77-342F3BE891B4}" type="datetimeFigureOut">
               <a:rPr kumimoji="1" lang="ja-JP" altLang="en-US" smtClean="0"/>
-              <a:t>2023/10/17</a:t>
+              <a:t>2026/7/27</a:t>
             </a:fld>
             <a:endParaRPr kumimoji="1" lang="ja-JP" altLang="en-US"/>
           </a:p>
@@ -5319,7 +5788,7 @@
           <a:p>
             <a:fld id="{08796073-9333-4BA1-BF77-342F3BE891B4}" type="datetimeFigureOut">
               <a:rPr kumimoji="1" lang="ja-JP" altLang="en-US" smtClean="0"/>
-              <a:t>2023/10/17</a:t>
+              <a:t>2026/7/27</a:t>
             </a:fld>
             <a:endParaRPr kumimoji="1" lang="ja-JP" altLang="en-US"/>
           </a:p>
@@ -5750,7 +6219,7 @@
           <a:p>
             <a:fld id="{08796073-9333-4BA1-BF77-342F3BE891B4}" type="datetimeFigureOut">
               <a:rPr kumimoji="1" lang="ja-JP" altLang="en-US" smtClean="0"/>
-              <a:t>2023/10/17</a:t>
+              <a:t>2026/7/27</a:t>
             </a:fld>
             <a:endParaRPr kumimoji="1" lang="ja-JP" altLang="en-US"/>
           </a:p>
@@ -5868,7 +6337,7 @@
           <a:p>
             <a:fld id="{08796073-9333-4BA1-BF77-342F3BE891B4}" type="datetimeFigureOut">
               <a:rPr kumimoji="1" lang="ja-JP" altLang="en-US" smtClean="0"/>
-              <a:t>2023/10/17</a:t>
+              <a:t>2026/7/27</a:t>
             </a:fld>
             <a:endParaRPr kumimoji="1" lang="ja-JP" altLang="en-US"/>
           </a:p>
@@ -5963,7 +6432,7 @@
           <a:p>
             <a:fld id="{08796073-9333-4BA1-BF77-342F3BE891B4}" type="datetimeFigureOut">
               <a:rPr kumimoji="1" lang="ja-JP" altLang="en-US" smtClean="0"/>
-              <a:t>2023/10/17</a:t>
+              <a:t>2026/7/27</a:t>
             </a:fld>
             <a:endParaRPr kumimoji="1" lang="ja-JP" altLang="en-US"/>
           </a:p>
@@ -6272,7 +6741,7 @@
           <a:p>
             <a:fld id="{08796073-9333-4BA1-BF77-342F3BE891B4}" type="datetimeFigureOut">
               <a:rPr kumimoji="1" lang="ja-JP" altLang="en-US" smtClean="0"/>
-              <a:t>2023/10/17</a:t>
+              <a:t>2026/7/27</a:t>
             </a:fld>
             <a:endParaRPr kumimoji="1" lang="ja-JP" altLang="en-US"/>
           </a:p>
@@ -6529,7 +6998,7 @@
           <a:p>
             <a:fld id="{08796073-9333-4BA1-BF77-342F3BE891B4}" type="datetimeFigureOut">
               <a:rPr kumimoji="1" lang="ja-JP" altLang="en-US" smtClean="0"/>
-              <a:t>2023/10/17</a:t>
+              <a:t>2026/7/27</a:t>
             </a:fld>
             <a:endParaRPr kumimoji="1" lang="ja-JP" altLang="en-US"/>
           </a:p>
@@ -6774,7 +7243,7 @@
           <a:p>
             <a:fld id="{08796073-9333-4BA1-BF77-342F3BE891B4}" type="datetimeFigureOut">
               <a:rPr kumimoji="1" lang="ja-JP" altLang="en-US" smtClean="0"/>
-              <a:t>2023/10/17</a:t>
+              <a:t>2026/7/27</a:t>
             </a:fld>
             <a:endParaRPr kumimoji="1" lang="ja-JP" altLang="en-US"/>
           </a:p>
@@ -7424,13 +7893,13 @@
             <p:nvPr/>
           </p:nvPicPr>
           <p:blipFill>
-            <a:blip r:embed="rId2">
+            <a:blip>
               <a:extLst>
                 <a:ext uri="{28A0092B-C50C-407E-A947-70E740481C1C}">
                   <a14:useLocalDpi xmlns:a14="http://schemas.microsoft.com/office/drawing/2010/main" val="0"/>
                 </a:ext>
                 <a:ext uri="{96DAC541-7B7A-43D3-8B79-37D633B846F1}">
-                  <asvg:svgBlip xmlns:asvg="http://schemas.microsoft.com/office/drawing/2016/SVG/main" r:embed="rId3"/>
+                  <asvg:svgBlip xmlns:asvg="http://schemas.microsoft.com/office/drawing/2016/SVG/main" r:embed="rId2"/>
                 </a:ext>
               </a:extLst>
             </a:blip>
@@ -7463,13 +7932,13 @@
             <p:nvPr/>
           </p:nvPicPr>
           <p:blipFill>
-            <a:blip r:embed="rId2">
+            <a:blip>
               <a:extLst>
                 <a:ext uri="{28A0092B-C50C-407E-A947-70E740481C1C}">
                   <a14:useLocalDpi xmlns:a14="http://schemas.microsoft.com/office/drawing/2010/main" val="0"/>
                 </a:ext>
                 <a:ext uri="{96DAC541-7B7A-43D3-8B79-37D633B846F1}">
-                  <asvg:svgBlip xmlns:asvg="http://schemas.microsoft.com/office/drawing/2016/SVG/main" r:embed="rId3"/>
+                  <asvg:svgBlip xmlns:asvg="http://schemas.microsoft.com/office/drawing/2016/SVG/main" r:embed="rId2"/>
                 </a:ext>
               </a:extLst>
             </a:blip>
@@ -7502,13 +7971,13 @@
             <p:nvPr/>
           </p:nvPicPr>
           <p:blipFill>
-            <a:blip r:embed="rId2">
+            <a:blip>
               <a:extLst>
                 <a:ext uri="{28A0092B-C50C-407E-A947-70E740481C1C}">
                   <a14:useLocalDpi xmlns:a14="http://schemas.microsoft.com/office/drawing/2010/main" val="0"/>
                 </a:ext>
                 <a:ext uri="{96DAC541-7B7A-43D3-8B79-37D633B846F1}">
-                  <asvg:svgBlip xmlns:asvg="http://schemas.microsoft.com/office/drawing/2016/SVG/main" r:embed="rId3"/>
+                  <asvg:svgBlip xmlns:asvg="http://schemas.microsoft.com/office/drawing/2016/SVG/main" r:embed="rId2"/>
                 </a:ext>
               </a:extLst>
             </a:blip>
@@ -7811,13 +8280,13 @@
             <p:nvPr/>
           </p:nvPicPr>
           <p:blipFill>
-            <a:blip r:embed="rId4">
+            <a:blip>
               <a:extLst>
                 <a:ext uri="{28A0092B-C50C-407E-A947-70E740481C1C}">
                   <a14:useLocalDpi xmlns:a14="http://schemas.microsoft.com/office/drawing/2010/main" val="0"/>
                 </a:ext>
                 <a:ext uri="{96DAC541-7B7A-43D3-8B79-37D633B846F1}">
-                  <asvg:svgBlip xmlns:asvg="http://schemas.microsoft.com/office/drawing/2016/SVG/main" r:embed="rId5"/>
+                  <asvg:svgBlip xmlns:asvg="http://schemas.microsoft.com/office/drawing/2016/SVG/main" r:embed="rId3"/>
                 </a:ext>
               </a:extLst>
             </a:blip>
@@ -7850,13 +8319,13 @@
             <p:nvPr/>
           </p:nvPicPr>
           <p:blipFill>
-            <a:blip r:embed="rId4">
+            <a:blip>
               <a:extLst>
                 <a:ext uri="{28A0092B-C50C-407E-A947-70E740481C1C}">
                   <a14:useLocalDpi xmlns:a14="http://schemas.microsoft.com/office/drawing/2010/main" val="0"/>
                 </a:ext>
                 <a:ext uri="{96DAC541-7B7A-43D3-8B79-37D633B846F1}">
-                  <asvg:svgBlip xmlns:asvg="http://schemas.microsoft.com/office/drawing/2016/SVG/main" r:embed="rId5"/>
+                  <asvg:svgBlip xmlns:asvg="http://schemas.microsoft.com/office/drawing/2016/SVG/main" r:embed="rId3"/>
                 </a:ext>
               </a:extLst>
             </a:blip>
@@ -7889,13 +8358,13 @@
             <p:nvPr/>
           </p:nvPicPr>
           <p:blipFill>
-            <a:blip r:embed="rId4">
+            <a:blip>
               <a:extLst>
                 <a:ext uri="{28A0092B-C50C-407E-A947-70E740481C1C}">
                   <a14:useLocalDpi xmlns:a14="http://schemas.microsoft.com/office/drawing/2010/main" val="0"/>
                 </a:ext>
                 <a:ext uri="{96DAC541-7B7A-43D3-8B79-37D633B846F1}">
-                  <asvg:svgBlip xmlns:asvg="http://schemas.microsoft.com/office/drawing/2016/SVG/main" r:embed="rId5"/>
+                  <asvg:svgBlip xmlns:asvg="http://schemas.microsoft.com/office/drawing/2016/SVG/main" r:embed="rId3"/>
                 </a:ext>
               </a:extLst>
             </a:blip>
@@ -7928,13 +8397,13 @@
             <p:nvPr/>
           </p:nvPicPr>
           <p:blipFill>
-            <a:blip r:embed="rId6">
+            <a:blip>
               <a:extLst>
                 <a:ext uri="{28A0092B-C50C-407E-A947-70E740481C1C}">
                   <a14:useLocalDpi xmlns:a14="http://schemas.microsoft.com/office/drawing/2010/main" val="0"/>
                 </a:ext>
                 <a:ext uri="{96DAC541-7B7A-43D3-8B79-37D633B846F1}">
-                  <asvg:svgBlip xmlns:asvg="http://schemas.microsoft.com/office/drawing/2016/SVG/main" r:embed="rId7"/>
+                  <asvg:svgBlip xmlns:asvg="http://schemas.microsoft.com/office/drawing/2016/SVG/main" r:embed="rId4"/>
                 </a:ext>
               </a:extLst>
             </a:blip>
@@ -7967,13 +8436,13 @@
             <p:nvPr/>
           </p:nvPicPr>
           <p:blipFill>
-            <a:blip r:embed="rId6">
+            <a:blip>
               <a:extLst>
                 <a:ext uri="{28A0092B-C50C-407E-A947-70E740481C1C}">
                   <a14:useLocalDpi xmlns:a14="http://schemas.microsoft.com/office/drawing/2010/main" val="0"/>
                 </a:ext>
                 <a:ext uri="{96DAC541-7B7A-43D3-8B79-37D633B846F1}">
-                  <asvg:svgBlip xmlns:asvg="http://schemas.microsoft.com/office/drawing/2016/SVG/main" r:embed="rId7"/>
+                  <asvg:svgBlip xmlns:asvg="http://schemas.microsoft.com/office/drawing/2016/SVG/main" r:embed="rId4"/>
                 </a:ext>
               </a:extLst>
             </a:blip>
@@ -8006,13 +8475,13 @@
             <p:nvPr/>
           </p:nvPicPr>
           <p:blipFill>
-            <a:blip r:embed="rId6">
+            <a:blip>
               <a:extLst>
                 <a:ext uri="{28A0092B-C50C-407E-A947-70E740481C1C}">
                   <a14:useLocalDpi xmlns:a14="http://schemas.microsoft.com/office/drawing/2010/main" val="0"/>
                 </a:ext>
                 <a:ext uri="{96DAC541-7B7A-43D3-8B79-37D633B846F1}">
-                  <asvg:svgBlip xmlns:asvg="http://schemas.microsoft.com/office/drawing/2016/SVG/main" r:embed="rId7"/>
+                  <asvg:svgBlip xmlns:asvg="http://schemas.microsoft.com/office/drawing/2016/SVG/main" r:embed="rId4"/>
                 </a:ext>
               </a:extLst>
             </a:blip>
@@ -8045,13 +8514,13 @@
             <p:nvPr/>
           </p:nvPicPr>
           <p:blipFill>
-            <a:blip r:embed="rId8">
+            <a:blip>
               <a:extLst>
                 <a:ext uri="{28A0092B-C50C-407E-A947-70E740481C1C}">
                   <a14:useLocalDpi xmlns:a14="http://schemas.microsoft.com/office/drawing/2010/main" val="0"/>
                 </a:ext>
                 <a:ext uri="{96DAC541-7B7A-43D3-8B79-37D633B846F1}">
-                  <asvg:svgBlip xmlns:asvg="http://schemas.microsoft.com/office/drawing/2016/SVG/main" r:embed="rId9"/>
+                  <asvg:svgBlip xmlns:asvg="http://schemas.microsoft.com/office/drawing/2016/SVG/main" r:embed="rId5"/>
                 </a:ext>
               </a:extLst>
             </a:blip>
@@ -8084,13 +8553,13 @@
             <p:nvPr/>
           </p:nvPicPr>
           <p:blipFill>
-            <a:blip r:embed="rId8">
+            <a:blip>
               <a:extLst>
                 <a:ext uri="{28A0092B-C50C-407E-A947-70E740481C1C}">
                   <a14:useLocalDpi xmlns:a14="http://schemas.microsoft.com/office/drawing/2010/main" val="0"/>
                 </a:ext>
                 <a:ext uri="{96DAC541-7B7A-43D3-8B79-37D633B846F1}">
-                  <asvg:svgBlip xmlns:asvg="http://schemas.microsoft.com/office/drawing/2016/SVG/main" r:embed="rId9"/>
+                  <asvg:svgBlip xmlns:asvg="http://schemas.microsoft.com/office/drawing/2016/SVG/main" r:embed="rId5"/>
                 </a:ext>
               </a:extLst>
             </a:blip>
@@ -8123,13 +8592,13 @@
             <p:nvPr/>
           </p:nvPicPr>
           <p:blipFill>
-            <a:blip r:embed="rId8">
+            <a:blip>
               <a:extLst>
                 <a:ext uri="{28A0092B-C50C-407E-A947-70E740481C1C}">
                   <a14:useLocalDpi xmlns:a14="http://schemas.microsoft.com/office/drawing/2010/main" val="0"/>
                 </a:ext>
                 <a:ext uri="{96DAC541-7B7A-43D3-8B79-37D633B846F1}">
-                  <asvg:svgBlip xmlns:asvg="http://schemas.microsoft.com/office/drawing/2016/SVG/main" r:embed="rId9"/>
+                  <asvg:svgBlip xmlns:asvg="http://schemas.microsoft.com/office/drawing/2016/SVG/main" r:embed="rId5"/>
                 </a:ext>
               </a:extLst>
             </a:blip>
@@ -8162,13 +8631,13 @@
             <p:nvPr/>
           </p:nvPicPr>
           <p:blipFill>
-            <a:blip r:embed="rId10">
+            <a:blip>
               <a:extLst>
                 <a:ext uri="{28A0092B-C50C-407E-A947-70E740481C1C}">
                   <a14:useLocalDpi xmlns:a14="http://schemas.microsoft.com/office/drawing/2010/main" val="0"/>
                 </a:ext>
                 <a:ext uri="{96DAC541-7B7A-43D3-8B79-37D633B846F1}">
-                  <asvg:svgBlip xmlns:asvg="http://schemas.microsoft.com/office/drawing/2016/SVG/main" r:embed="rId11"/>
+                  <asvg:svgBlip xmlns:asvg="http://schemas.microsoft.com/office/drawing/2016/SVG/main" r:embed="rId6"/>
                 </a:ext>
               </a:extLst>
             </a:blip>
@@ -8201,13 +8670,13 @@
             <p:nvPr/>
           </p:nvPicPr>
           <p:blipFill>
-            <a:blip r:embed="rId10">
+            <a:blip>
               <a:extLst>
                 <a:ext uri="{28A0092B-C50C-407E-A947-70E740481C1C}">
                   <a14:useLocalDpi xmlns:a14="http://schemas.microsoft.com/office/drawing/2010/main" val="0"/>
                 </a:ext>
                 <a:ext uri="{96DAC541-7B7A-43D3-8B79-37D633B846F1}">
-                  <asvg:svgBlip xmlns:asvg="http://schemas.microsoft.com/office/drawing/2016/SVG/main" r:embed="rId11"/>
+                  <asvg:svgBlip xmlns:asvg="http://schemas.microsoft.com/office/drawing/2016/SVG/main" r:embed="rId6"/>
                 </a:ext>
               </a:extLst>
             </a:blip>
@@ -8240,13 +8709,13 @@
             <p:nvPr/>
           </p:nvPicPr>
           <p:blipFill>
-            <a:blip r:embed="rId10">
+            <a:blip>
               <a:extLst>
                 <a:ext uri="{28A0092B-C50C-407E-A947-70E740481C1C}">
                   <a14:useLocalDpi xmlns:a14="http://schemas.microsoft.com/office/drawing/2010/main" val="0"/>
                 </a:ext>
                 <a:ext uri="{96DAC541-7B7A-43D3-8B79-37D633B846F1}">
-                  <asvg:svgBlip xmlns:asvg="http://schemas.microsoft.com/office/drawing/2016/SVG/main" r:embed="rId11"/>
+                  <asvg:svgBlip xmlns:asvg="http://schemas.microsoft.com/office/drawing/2016/SVG/main" r:embed="rId6"/>
                 </a:ext>
               </a:extLst>
             </a:blip>
@@ -8279,13 +8748,13 @@
             <p:nvPr/>
           </p:nvPicPr>
           <p:blipFill>
-            <a:blip r:embed="rId12">
+            <a:blip>
               <a:extLst>
                 <a:ext uri="{28A0092B-C50C-407E-A947-70E740481C1C}">
                   <a14:useLocalDpi xmlns:a14="http://schemas.microsoft.com/office/drawing/2010/main" val="0"/>
                 </a:ext>
                 <a:ext uri="{96DAC541-7B7A-43D3-8B79-37D633B846F1}">
-                  <asvg:svgBlip xmlns:asvg="http://schemas.microsoft.com/office/drawing/2016/SVG/main" r:embed="rId13"/>
+                  <asvg:svgBlip xmlns:asvg="http://schemas.microsoft.com/office/drawing/2016/SVG/main" r:embed="rId7"/>
                 </a:ext>
               </a:extLst>
             </a:blip>
@@ -8318,13 +8787,13 @@
             <p:nvPr/>
           </p:nvPicPr>
           <p:blipFill>
-            <a:blip r:embed="rId12">
+            <a:blip>
               <a:extLst>
                 <a:ext uri="{28A0092B-C50C-407E-A947-70E740481C1C}">
                   <a14:useLocalDpi xmlns:a14="http://schemas.microsoft.com/office/drawing/2010/main" val="0"/>
                 </a:ext>
                 <a:ext uri="{96DAC541-7B7A-43D3-8B79-37D633B846F1}">
-                  <asvg:svgBlip xmlns:asvg="http://schemas.microsoft.com/office/drawing/2016/SVG/main" r:embed="rId13"/>
+                  <asvg:svgBlip xmlns:asvg="http://schemas.microsoft.com/office/drawing/2016/SVG/main" r:embed="rId7"/>
                 </a:ext>
               </a:extLst>
             </a:blip>
@@ -8357,13 +8826,13 @@
             <p:nvPr/>
           </p:nvPicPr>
           <p:blipFill>
-            <a:blip r:embed="rId12">
+            <a:blip>
               <a:extLst>
                 <a:ext uri="{28A0092B-C50C-407E-A947-70E740481C1C}">
                   <a14:useLocalDpi xmlns:a14="http://schemas.microsoft.com/office/drawing/2010/main" val="0"/>
                 </a:ext>
                 <a:ext uri="{96DAC541-7B7A-43D3-8B79-37D633B846F1}">
-                  <asvg:svgBlip xmlns:asvg="http://schemas.microsoft.com/office/drawing/2016/SVG/main" r:embed="rId13"/>
+                  <asvg:svgBlip xmlns:asvg="http://schemas.microsoft.com/office/drawing/2016/SVG/main" r:embed="rId7"/>
                 </a:ext>
               </a:extLst>
             </a:blip>
@@ -8426,7 +8895,7 @@
         </p:nvGrpSpPr>
         <p:grpSpPr>
           <a:xfrm>
-            <a:off x="247791" y="323623"/>
+            <a:off x="247791" y="848917"/>
             <a:ext cx="11258272" cy="9629261"/>
             <a:chOff x="247791" y="323623"/>
             <a:chExt cx="11258272" cy="9629261"/>
@@ -8702,7 +9171,7 @@
                   <a:latin typeface="+mn-ea"/>
                   <a:cs typeface="Times New Roman" panose="02020603050405020304" pitchFamily="18" charset="0"/>
                 </a:rPr>
-                <a:t>Use as reserve</a:t>
+                <a:t>Secure the required quantity</a:t>
               </a:r>
               <a:endParaRPr lang="ja-JP" altLang="en-US" sz="1050" kern="100" dirty="0">
                 <a:solidFill>
@@ -15643,7 +16112,7 @@
                     <a:latin typeface="+mn-ea"/>
                     <a:cs typeface="Times New Roman" panose="02020603050405020304" pitchFamily="18" charset="0"/>
                   </a:rPr>
-                  <a:t>Fixed to zero</a:t>
+                  <a:t> Fixed to the defined value</a:t>
                 </a:r>
                 <a:endParaRPr lang="ja-JP" altLang="en-US" sz="1050" kern="100" dirty="0">
                   <a:solidFill>
@@ -16039,7 +16508,7 @@
           <p:spPr>
             <a:xfrm>
               <a:off x="3357494" y="6317308"/>
-              <a:ext cx="1488317" cy="268214"/>
+              <a:ext cx="1488317" cy="429797"/>
             </a:xfrm>
             <a:prstGeom prst="rect">
               <a:avLst/>
@@ -16061,7 +16530,7 @@
                   <a:latin typeface="+mn-ea"/>
                   <a:cs typeface="Times New Roman" panose="02020603050405020304" pitchFamily="18" charset="0"/>
                 </a:rPr>
-                <a:t>Tertiary reserve</a:t>
+                <a:t>Secured tertiary reserve</a:t>
               </a:r>
               <a:endParaRPr lang="ja-JP" altLang="en-US" sz="1050" kern="100" dirty="0">
                 <a:latin typeface="+mn-ea"/>
@@ -16370,7 +16839,7 @@
                   <a:latin typeface="+mn-ea"/>
                   <a:cs typeface="Times New Roman" panose="02020603050405020304" pitchFamily="18" charset="0"/>
                 </a:rPr>
-                <a:t>Use as reserve</a:t>
+                <a:t>Used to meet the power balance</a:t>
               </a:r>
               <a:endParaRPr lang="ja-JP" altLang="en-US" sz="1050" kern="100" dirty="0">
                 <a:solidFill>
@@ -16468,7 +16937,7 @@
                   <a:latin typeface="+mn-ea"/>
                   <a:cs typeface="Times New Roman" panose="02020603050405020304" pitchFamily="18" charset="0"/>
                 </a:rPr>
-                <a:t>Ensure required value</a:t>
+                <a:t>Secure the required quantity</a:t>
               </a:r>
               <a:endParaRPr lang="ja-JP" altLang="en-US" sz="1050" kern="100" dirty="0">
                 <a:solidFill>
@@ -16705,6 +17174,934 @@
     <p:extLst>
       <p:ext uri="{BB962C8B-B14F-4D97-AF65-F5344CB8AC3E}">
         <p14:creationId xmlns:p14="http://schemas.microsoft.com/office/powerpoint/2010/main" val="1777097711"/>
+      </p:ext>
+    </p:extLst>
+  </p:cSld>
+  <p:clrMapOvr>
+    <a:masterClrMapping/>
+  </p:clrMapOvr>
+</p:sld>
+</file>
+
+<file path=ppt/slides/slide3.xml><?xml version="1.0" encoding="utf-8"?>
+<p:sld xmlns:a="http://schemas.openxmlformats.org/drawingml/2006/main" xmlns:r="http://schemas.openxmlformats.org/officeDocument/2006/relationships" xmlns:p="http://schemas.openxmlformats.org/presentationml/2006/main">
+  <p:cSld>
+    <p:spTree>
+      <p:nvGrpSpPr>
+        <p:cNvPr id="1" name=""/>
+        <p:cNvGrpSpPr/>
+        <p:nvPr/>
+      </p:nvGrpSpPr>
+      <p:grpSpPr>
+        <a:xfrm>
+          <a:off x="0" y="0"/>
+          <a:ext cx="0" cy="0"/>
+          <a:chOff x="0" y="0"/>
+          <a:chExt cx="0" cy="0"/>
+        </a:xfrm>
+      </p:grpSpPr>
+      <p:grpSp>
+        <p:nvGrpSpPr>
+          <p:cNvPr id="26" name="グループ化 25">
+            <a:extLst>
+              <a:ext uri="{FF2B5EF4-FFF2-40B4-BE49-F238E27FC236}">
+                <a16:creationId xmlns:a16="http://schemas.microsoft.com/office/drawing/2014/main" id="{701D41A7-2C18-95CC-C7A3-C0ADD8067479}"/>
+              </a:ext>
+            </a:extLst>
+          </p:cNvPr>
+          <p:cNvGrpSpPr/>
+          <p:nvPr/>
+        </p:nvGrpSpPr>
+        <p:grpSpPr>
+          <a:xfrm>
+            <a:off x="3098807" y="638681"/>
+            <a:ext cx="7126740" cy="3225396"/>
+            <a:chOff x="3098807" y="638681"/>
+            <a:chExt cx="7126740" cy="3225396"/>
+          </a:xfrm>
+        </p:grpSpPr>
+        <p:sp>
+          <p:nvSpPr>
+            <p:cNvPr id="24" name="正方形/長方形 23">
+              <a:extLst>
+                <a:ext uri="{FF2B5EF4-FFF2-40B4-BE49-F238E27FC236}">
+                  <a16:creationId xmlns:a16="http://schemas.microsoft.com/office/drawing/2014/main" id="{12D3853D-5AD6-EA75-329C-33CBD8D111D2}"/>
+                </a:ext>
+              </a:extLst>
+            </p:cNvPr>
+            <p:cNvSpPr/>
+            <p:nvPr/>
+          </p:nvSpPr>
+          <p:spPr>
+            <a:xfrm>
+              <a:off x="3288962" y="638681"/>
+              <a:ext cx="6936585" cy="3225396"/>
+            </a:xfrm>
+            <a:prstGeom prst="rect">
+              <a:avLst/>
+            </a:prstGeom>
+            <a:solidFill>
+              <a:schemeClr val="bg1"/>
+            </a:solidFill>
+            <a:ln>
+              <a:noFill/>
+            </a:ln>
+          </p:spPr>
+          <p:style>
+            <a:lnRef idx="2">
+              <a:schemeClr val="accent1">
+                <a:shade val="15000"/>
+              </a:schemeClr>
+            </a:lnRef>
+            <a:fillRef idx="1">
+              <a:schemeClr val="accent1"/>
+            </a:fillRef>
+            <a:effectRef idx="0">
+              <a:schemeClr val="accent1"/>
+            </a:effectRef>
+            <a:fontRef idx="minor">
+              <a:schemeClr val="lt1"/>
+            </a:fontRef>
+          </p:style>
+          <p:txBody>
+            <a:bodyPr rtlCol="0" anchor="ctr"/>
+            <a:lstStyle/>
+            <a:p>
+              <a:pPr algn="ctr"/>
+              <a:endParaRPr kumimoji="1" lang="ja-JP" altLang="en-US"/>
+            </a:p>
+          </p:txBody>
+        </p:sp>
+        <p:sp>
+          <p:nvSpPr>
+            <p:cNvPr id="4" name="テキスト ボックス 258098665">
+              <a:extLst>
+                <a:ext uri="{FF2B5EF4-FFF2-40B4-BE49-F238E27FC236}">
+                  <a16:creationId xmlns:a16="http://schemas.microsoft.com/office/drawing/2014/main" id="{92C06134-26DE-6A15-B0CC-A8005F02C4E3}"/>
+                </a:ext>
+              </a:extLst>
+            </p:cNvPr>
+            <p:cNvSpPr txBox="1"/>
+            <p:nvPr/>
+          </p:nvSpPr>
+          <p:spPr>
+            <a:xfrm>
+              <a:off x="4192032" y="810853"/>
+              <a:ext cx="2234167" cy="429797"/>
+            </a:xfrm>
+            <a:prstGeom prst="rect">
+              <a:avLst/>
+            </a:prstGeom>
+            <a:noFill/>
+          </p:spPr>
+          <p:txBody>
+            <a:bodyPr rot="0" spcFirstLastPara="0" vert="horz" wrap="square" lIns="105601" tIns="52800" rIns="105601" bIns="52800" numCol="1" spcCol="0" rtlCol="0" fromWordArt="0" anchor="t" anchorCtr="0" forceAA="0" compatLnSpc="1">
+              <a:prstTxWarp prst="textNoShape">
+                <a:avLst/>
+              </a:prstTxWarp>
+              <a:spAutoFit/>
+            </a:bodyPr>
+            <a:lstStyle/>
+            <a:p>
+              <a:pPr algn="ctr" fontAlgn="base"/>
+              <a:r>
+                <a:rPr lang="el-GR" altLang="ja-JP" sz="1050" b="1" kern="100" dirty="0">
+                  <a:solidFill>
+                    <a:srgbClr val="000000"/>
+                  </a:solidFill>
+                  <a:latin typeface="+mn-ea"/>
+                  <a:cs typeface="Times New Roman" panose="02020603050405020304" pitchFamily="18" charset="0"/>
+                </a:rPr>
+                <a:t>Δ</a:t>
+              </a:r>
+              <a:r>
+                <a:rPr lang="en" altLang="ja-JP" sz="1050" b="1" kern="100" dirty="0">
+                  <a:solidFill>
+                    <a:srgbClr val="000000"/>
+                  </a:solidFill>
+                  <a:latin typeface="+mn-ea"/>
+                  <a:cs typeface="Times New Roman" panose="02020603050405020304" pitchFamily="18" charset="0"/>
+                </a:rPr>
+                <a:t>kW no-market type </a:t>
+              </a:r>
+            </a:p>
+            <a:p>
+              <a:pPr algn="ctr" fontAlgn="base"/>
+              <a:r>
+                <a:rPr lang="en" altLang="ja-JP" sz="1050" b="1" kern="100" dirty="0">
+                  <a:solidFill>
+                    <a:srgbClr val="000000"/>
+                  </a:solidFill>
+                  <a:latin typeface="+mn-ea"/>
+                  <a:cs typeface="Times New Roman" panose="02020603050405020304" pitchFamily="18" charset="0"/>
+                </a:rPr>
+                <a:t>(delta-kW-no-market)</a:t>
+              </a:r>
+              <a:endParaRPr lang="ja-JP" altLang="en-US" sz="1050" b="1" kern="100" dirty="0">
+                <a:latin typeface="+mn-ea"/>
+                <a:cs typeface="Times New Roman" panose="02020603050405020304" pitchFamily="18" charset="0"/>
+              </a:endParaRPr>
+            </a:p>
+          </p:txBody>
+        </p:sp>
+        <p:sp>
+          <p:nvSpPr>
+            <p:cNvPr id="5" name="テキスト ボックス 258098665">
+              <a:extLst>
+                <a:ext uri="{FF2B5EF4-FFF2-40B4-BE49-F238E27FC236}">
+                  <a16:creationId xmlns:a16="http://schemas.microsoft.com/office/drawing/2014/main" id="{C7402BFF-8352-140D-488E-A4AB872D8E3E}"/>
+                </a:ext>
+              </a:extLst>
+            </p:cNvPr>
+            <p:cNvSpPr txBox="1"/>
+            <p:nvPr/>
+          </p:nvSpPr>
+          <p:spPr>
+            <a:xfrm>
+              <a:off x="7075063" y="807960"/>
+              <a:ext cx="2963669" cy="429797"/>
+            </a:xfrm>
+            <a:prstGeom prst="rect">
+              <a:avLst/>
+            </a:prstGeom>
+            <a:noFill/>
+          </p:spPr>
+          <p:txBody>
+            <a:bodyPr rot="0" spcFirstLastPara="0" vert="horz" wrap="square" lIns="105601" tIns="52800" rIns="105601" bIns="52800" numCol="1" spcCol="0" rtlCol="0" fromWordArt="0" anchor="t" anchorCtr="0" forceAA="0" compatLnSpc="1">
+              <a:prstTxWarp prst="textNoShape">
+                <a:avLst/>
+              </a:prstTxWarp>
+              <a:spAutoFit/>
+            </a:bodyPr>
+            <a:lstStyle/>
+            <a:p>
+              <a:pPr algn="ctr" fontAlgn="base"/>
+              <a:r>
+                <a:rPr lang="el-GR" altLang="ja-JP" sz="1050" b="1" kern="100" dirty="0">
+                  <a:solidFill>
+                    <a:srgbClr val="000000"/>
+                  </a:solidFill>
+                  <a:latin typeface="+mn-ea"/>
+                  <a:cs typeface="Times New Roman" panose="02020603050405020304" pitchFamily="18" charset="0"/>
+                </a:rPr>
+                <a:t>Δ</a:t>
+              </a:r>
+              <a:r>
+                <a:rPr lang="en" altLang="ja-JP" sz="1050" b="1" kern="100" dirty="0">
+                  <a:solidFill>
+                    <a:srgbClr val="000000"/>
+                  </a:solidFill>
+                  <a:latin typeface="+mn-ea"/>
+                  <a:cs typeface="Times New Roman" panose="02020603050405020304" pitchFamily="18" charset="0"/>
+                </a:rPr>
+                <a:t>kW bid type </a:t>
+              </a:r>
+            </a:p>
+            <a:p>
+              <a:pPr algn="ctr" fontAlgn="base"/>
+              <a:r>
+                <a:rPr lang="en" altLang="ja-JP" sz="1050" b="1" kern="100" dirty="0">
+                  <a:solidFill>
+                    <a:srgbClr val="000000"/>
+                  </a:solidFill>
+                  <a:latin typeface="+mn-ea"/>
+                  <a:cs typeface="Times New Roman" panose="02020603050405020304" pitchFamily="18" charset="0"/>
+                </a:rPr>
+                <a:t>(delta-kW-bid)</a:t>
+              </a:r>
+              <a:endParaRPr lang="en-US" altLang="ja-JP" sz="1050" b="1" kern="100" dirty="0">
+                <a:solidFill>
+                  <a:srgbClr val="000000"/>
+                </a:solidFill>
+                <a:latin typeface="+mn-ea"/>
+                <a:cs typeface="Times New Roman" panose="02020603050405020304" pitchFamily="18" charset="0"/>
+              </a:endParaRPr>
+            </a:p>
+          </p:txBody>
+        </p:sp>
+        <p:sp>
+          <p:nvSpPr>
+            <p:cNvPr id="8" name="テキスト ボックス 258098665">
+              <a:extLst>
+                <a:ext uri="{FF2B5EF4-FFF2-40B4-BE49-F238E27FC236}">
+                  <a16:creationId xmlns:a16="http://schemas.microsoft.com/office/drawing/2014/main" id="{01A5A62B-CE13-D96E-8CCB-E640CC624951}"/>
+                </a:ext>
+              </a:extLst>
+            </p:cNvPr>
+            <p:cNvSpPr txBox="1"/>
+            <p:nvPr/>
+          </p:nvSpPr>
+          <p:spPr>
+            <a:xfrm>
+              <a:off x="3098807" y="1520474"/>
+              <a:ext cx="957944" cy="429797"/>
+            </a:xfrm>
+            <a:prstGeom prst="rect">
+              <a:avLst/>
+            </a:prstGeom>
+            <a:noFill/>
+          </p:spPr>
+          <p:txBody>
+            <a:bodyPr rot="0" spcFirstLastPara="0" vert="horz" wrap="square" lIns="105601" tIns="52800" rIns="105601" bIns="52800" numCol="1" spcCol="0" rtlCol="0" fromWordArt="0" anchor="t" anchorCtr="0" forceAA="0" compatLnSpc="1">
+              <a:prstTxWarp prst="textNoShape">
+                <a:avLst/>
+              </a:prstTxWarp>
+              <a:spAutoFit/>
+            </a:bodyPr>
+            <a:lstStyle/>
+            <a:p>
+              <a:pPr algn="just" fontAlgn="base"/>
+              <a:r>
+                <a:rPr lang="en" altLang="ja-JP" sz="1050" kern="100" dirty="0">
+                  <a:solidFill>
+                    <a:srgbClr val="000000"/>
+                  </a:solidFill>
+                  <a:latin typeface="+mn-ea"/>
+                  <a:cs typeface="Times New Roman" panose="02020603050405020304" pitchFamily="18" charset="0"/>
+                </a:rPr>
+                <a:t>Day-ahead scheduling</a:t>
+              </a:r>
+              <a:endParaRPr lang="en-US" altLang="ja-JP" sz="1050" kern="100" dirty="0">
+                <a:solidFill>
+                  <a:srgbClr val="000000"/>
+                </a:solidFill>
+                <a:latin typeface="+mn-ea"/>
+                <a:cs typeface="Times New Roman" panose="02020603050405020304" pitchFamily="18" charset="0"/>
+              </a:endParaRPr>
+            </a:p>
+          </p:txBody>
+        </p:sp>
+        <p:sp>
+          <p:nvSpPr>
+            <p:cNvPr id="10" name="テキスト ボックス 258098665">
+              <a:extLst>
+                <a:ext uri="{FF2B5EF4-FFF2-40B4-BE49-F238E27FC236}">
+                  <a16:creationId xmlns:a16="http://schemas.microsoft.com/office/drawing/2014/main" id="{2F9085F1-6AAD-9B4D-5D24-25A0273CDDF4}"/>
+                </a:ext>
+              </a:extLst>
+            </p:cNvPr>
+            <p:cNvSpPr txBox="1"/>
+            <p:nvPr/>
+          </p:nvSpPr>
+          <p:spPr>
+            <a:xfrm>
+              <a:off x="3098807" y="3162507"/>
+              <a:ext cx="957944" cy="429797"/>
+            </a:xfrm>
+            <a:prstGeom prst="rect">
+              <a:avLst/>
+            </a:prstGeom>
+            <a:noFill/>
+          </p:spPr>
+          <p:txBody>
+            <a:bodyPr rot="0" spcFirstLastPara="0" vert="horz" wrap="square" lIns="105601" tIns="52800" rIns="105601" bIns="52800" numCol="1" spcCol="0" rtlCol="0" fromWordArt="0" anchor="t" anchorCtr="0" forceAA="0" compatLnSpc="1">
+              <a:prstTxWarp prst="textNoShape">
+                <a:avLst/>
+              </a:prstTxWarp>
+              <a:spAutoFit/>
+            </a:bodyPr>
+            <a:lstStyle/>
+            <a:p>
+              <a:pPr algn="just" fontAlgn="base"/>
+              <a:r>
+                <a:rPr lang="en" altLang="ja-JP" sz="1050" kern="100" dirty="0">
+                  <a:solidFill>
+                    <a:srgbClr val="000000"/>
+                  </a:solidFill>
+                  <a:latin typeface="+mn-ea"/>
+                  <a:cs typeface="Times New Roman" panose="02020603050405020304" pitchFamily="18" charset="0"/>
+                </a:rPr>
+                <a:t>Intra-day scheduling</a:t>
+              </a:r>
+              <a:endParaRPr lang="en-US" altLang="ja-JP" sz="1050" kern="100" dirty="0">
+                <a:solidFill>
+                  <a:srgbClr val="000000"/>
+                </a:solidFill>
+                <a:latin typeface="+mn-ea"/>
+                <a:cs typeface="Times New Roman" panose="02020603050405020304" pitchFamily="18" charset="0"/>
+              </a:endParaRPr>
+            </a:p>
+          </p:txBody>
+        </p:sp>
+        <p:sp>
+          <p:nvSpPr>
+            <p:cNvPr id="12" name="テキスト ボックス 11">
+              <a:extLst>
+                <a:ext uri="{FF2B5EF4-FFF2-40B4-BE49-F238E27FC236}">
+                  <a16:creationId xmlns:a16="http://schemas.microsoft.com/office/drawing/2014/main" id="{4FA556CC-9033-9160-4116-7ED83DC87C5E}"/>
+                </a:ext>
+              </a:extLst>
+            </p:cNvPr>
+            <p:cNvSpPr txBox="1"/>
+            <p:nvPr/>
+          </p:nvSpPr>
+          <p:spPr>
+            <a:xfrm>
+              <a:off x="4158792" y="1285250"/>
+              <a:ext cx="2572083" cy="738664"/>
+            </a:xfrm>
+            <a:prstGeom prst="rect">
+              <a:avLst/>
+            </a:prstGeom>
+            <a:noFill/>
+          </p:spPr>
+          <p:txBody>
+            <a:bodyPr wrap="square">
+              <a:spAutoFit/>
+            </a:bodyPr>
+            <a:lstStyle/>
+            <a:p>
+              <a:pPr>
+                <a:buNone/>
+              </a:pPr>
+              <a:r>
+                <a:rPr lang="en" altLang="ja-JP" sz="1050" dirty="0">
+                  <a:latin typeface="+mn-ea"/>
+                </a:rPr>
+                <a:t>Tertiary reserve</a:t>
+              </a:r>
+            </a:p>
+            <a:p>
+              <a:pPr>
+                <a:buNone/>
+              </a:pPr>
+              <a:r>
+                <a:rPr lang="en" altLang="ja-JP" sz="1050" dirty="0">
+                  <a:solidFill>
+                    <a:schemeClr val="accent1"/>
+                  </a:solidFill>
+                  <a:latin typeface="+mn-ea"/>
+                </a:rPr>
+                <a:t>Secured as the required reserve quantity</a:t>
+              </a:r>
+            </a:p>
+            <a:p>
+              <a:pPr>
+                <a:buNone/>
+              </a:pPr>
+              <a:r>
+                <a:rPr lang="en" altLang="ja-JP" sz="1050" dirty="0">
+                  <a:solidFill>
+                    <a:schemeClr val="accent1"/>
+                  </a:solidFill>
+                  <a:latin typeface="+mn-ea"/>
+                </a:rPr>
+                <a:t>(no procurement cost is counted)</a:t>
+              </a:r>
+              <a:endParaRPr lang="ja-JP" altLang="ja-JP" sz="1050">
+                <a:solidFill>
+                  <a:schemeClr val="accent1"/>
+                </a:solidFill>
+                <a:latin typeface="+mn-ea"/>
+              </a:endParaRPr>
+            </a:p>
+          </p:txBody>
+        </p:sp>
+        <p:sp>
+          <p:nvSpPr>
+            <p:cNvPr id="14" name="テキスト ボックス 13">
+              <a:extLst>
+                <a:ext uri="{FF2B5EF4-FFF2-40B4-BE49-F238E27FC236}">
+                  <a16:creationId xmlns:a16="http://schemas.microsoft.com/office/drawing/2014/main" id="{70DC2367-32B0-1A1B-A2F0-9078771DAC48}"/>
+                </a:ext>
+              </a:extLst>
+            </p:cNvPr>
+            <p:cNvSpPr txBox="1"/>
+            <p:nvPr/>
+          </p:nvSpPr>
+          <p:spPr>
+            <a:xfrm>
+              <a:off x="4192033" y="3059530"/>
+              <a:ext cx="2375910" cy="577081"/>
+            </a:xfrm>
+            <a:prstGeom prst="rect">
+              <a:avLst/>
+            </a:prstGeom>
+            <a:noFill/>
+          </p:spPr>
+          <p:txBody>
+            <a:bodyPr wrap="square">
+              <a:spAutoFit/>
+            </a:bodyPr>
+            <a:lstStyle/>
+            <a:p>
+              <a:pPr>
+                <a:buNone/>
+              </a:pPr>
+              <a:r>
+                <a:rPr lang="en-US" altLang="ja-JP" sz="1050" dirty="0">
+                  <a:latin typeface="+mn-ea"/>
+                </a:rPr>
+                <a:t>Secured tertiary reserve</a:t>
+              </a:r>
+            </a:p>
+            <a:p>
+              <a:pPr>
+                <a:buNone/>
+              </a:pPr>
+              <a:r>
+                <a:rPr lang="en-US" altLang="ja-JP" sz="1050" dirty="0">
+                  <a:solidFill>
+                    <a:schemeClr val="accent1"/>
+                  </a:solidFill>
+                  <a:latin typeface="+mn-ea"/>
+                </a:rPr>
+                <a:t>Used as reserve to meet the power balance</a:t>
+              </a:r>
+            </a:p>
+          </p:txBody>
+        </p:sp>
+        <p:sp>
+          <p:nvSpPr>
+            <p:cNvPr id="15" name="テキスト ボックス 14">
+              <a:extLst>
+                <a:ext uri="{FF2B5EF4-FFF2-40B4-BE49-F238E27FC236}">
+                  <a16:creationId xmlns:a16="http://schemas.microsoft.com/office/drawing/2014/main" id="{FCFF36A6-F344-99BC-1973-5E775DA7A15F}"/>
+                </a:ext>
+              </a:extLst>
+            </p:cNvPr>
+            <p:cNvSpPr txBox="1"/>
+            <p:nvPr/>
+          </p:nvSpPr>
+          <p:spPr>
+            <a:xfrm>
+              <a:off x="7075063" y="1237757"/>
+              <a:ext cx="2963663" cy="577081"/>
+            </a:xfrm>
+            <a:prstGeom prst="rect">
+              <a:avLst/>
+            </a:prstGeom>
+            <a:noFill/>
+          </p:spPr>
+          <p:txBody>
+            <a:bodyPr wrap="square">
+              <a:spAutoFit/>
+            </a:bodyPr>
+            <a:lstStyle/>
+            <a:p>
+              <a:pPr>
+                <a:buNone/>
+              </a:pPr>
+              <a:r>
+                <a:rPr lang="en" altLang="ja-JP" sz="1050" dirty="0">
+                  <a:latin typeface="+mn-ea"/>
+                </a:rPr>
+                <a:t>Tertiary reserve</a:t>
+              </a:r>
+            </a:p>
+            <a:p>
+              <a:pPr>
+                <a:buNone/>
+              </a:pPr>
+              <a:r>
+                <a:rPr lang="en" altLang="ja-JP" sz="1050" dirty="0">
+                  <a:solidFill>
+                    <a:schemeClr val="accent1"/>
+                  </a:solidFill>
+                  <a:latin typeface="+mn-ea"/>
+                </a:rPr>
+                <a:t>Secured as </a:t>
+              </a:r>
+              <a:r>
+                <a:rPr lang="el-GR" altLang="ja-JP" sz="1050" dirty="0">
+                  <a:solidFill>
+                    <a:schemeClr val="accent1"/>
+                  </a:solidFill>
+                  <a:latin typeface="+mn-ea"/>
+                </a:rPr>
+                <a:t>Δ</a:t>
+              </a:r>
+              <a:r>
+                <a:rPr lang="en" altLang="ja-JP" sz="1050" dirty="0">
+                  <a:solidFill>
+                    <a:schemeClr val="accent1"/>
+                  </a:solidFill>
+                  <a:latin typeface="+mn-ea"/>
+                </a:rPr>
+                <a:t>kW, with procurement cost counted at its </a:t>
+              </a:r>
+              <a:r>
+                <a:rPr lang="el-GR" altLang="ja-JP" sz="1050" dirty="0">
+                  <a:solidFill>
+                    <a:schemeClr val="accent1"/>
+                  </a:solidFill>
+                  <a:latin typeface="+mn-ea"/>
+                </a:rPr>
+                <a:t>Δ</a:t>
+              </a:r>
+              <a:r>
+                <a:rPr lang="en" altLang="ja-JP" sz="1050" dirty="0">
+                  <a:solidFill>
+                    <a:schemeClr val="accent1"/>
+                  </a:solidFill>
+                  <a:latin typeface="+mn-ea"/>
+                </a:rPr>
+                <a:t>kW value</a:t>
+              </a:r>
+              <a:endParaRPr lang="ja-JP" altLang="en-US" sz="1050">
+                <a:solidFill>
+                  <a:schemeClr val="accent1"/>
+                </a:solidFill>
+                <a:latin typeface="+mn-ea"/>
+              </a:endParaRPr>
+            </a:p>
+          </p:txBody>
+        </p:sp>
+        <p:sp>
+          <p:nvSpPr>
+            <p:cNvPr id="16" name="テキスト ボックス 15">
+              <a:extLst>
+                <a:ext uri="{FF2B5EF4-FFF2-40B4-BE49-F238E27FC236}">
+                  <a16:creationId xmlns:a16="http://schemas.microsoft.com/office/drawing/2014/main" id="{ECF170BF-C782-C36F-0909-E87FDBD0ECBA}"/>
+                </a:ext>
+              </a:extLst>
+            </p:cNvPr>
+            <p:cNvSpPr txBox="1"/>
+            <p:nvPr/>
+          </p:nvSpPr>
+          <p:spPr>
+            <a:xfrm>
+              <a:off x="7075065" y="3008073"/>
+              <a:ext cx="2963668" cy="738664"/>
+            </a:xfrm>
+            <a:prstGeom prst="rect">
+              <a:avLst/>
+            </a:prstGeom>
+            <a:noFill/>
+          </p:spPr>
+          <p:txBody>
+            <a:bodyPr wrap="square">
+              <a:spAutoFit/>
+            </a:bodyPr>
+            <a:lstStyle/>
+            <a:p>
+              <a:pPr>
+                <a:buNone/>
+              </a:pPr>
+              <a:r>
+                <a:rPr lang="en" altLang="ja-JP" sz="1050" dirty="0">
+                  <a:latin typeface="+mn-ea"/>
+                </a:rPr>
+                <a:t>Secured tertiary reserve</a:t>
+              </a:r>
+            </a:p>
+            <a:p>
+              <a:pPr>
+                <a:buNone/>
+              </a:pPr>
+              <a:r>
+                <a:rPr lang="en" altLang="ja-JP" sz="1050" dirty="0">
+                  <a:solidFill>
+                    <a:schemeClr val="accent1"/>
+                  </a:solidFill>
+                  <a:latin typeface="+mn-ea"/>
+                </a:rPr>
+                <a:t>The power balance is met within the secured </a:t>
+              </a:r>
+              <a:r>
+                <a:rPr lang="el-GR" altLang="ja-JP" sz="1050" dirty="0">
+                  <a:solidFill>
+                    <a:schemeClr val="accent1"/>
+                  </a:solidFill>
+                  <a:latin typeface="+mn-ea"/>
+                </a:rPr>
+                <a:t>Δ</a:t>
+              </a:r>
+              <a:r>
+                <a:rPr lang="en" altLang="ja-JP" sz="1050" dirty="0">
+                  <a:solidFill>
+                    <a:schemeClr val="accent1"/>
+                  </a:solidFill>
+                  <a:latin typeface="+mn-ea"/>
+                </a:rPr>
+                <a:t>kW, and procurement cost is counted for the kWh used (kWh value)</a:t>
+              </a:r>
+              <a:endParaRPr lang="ja-JP" altLang="en-US" sz="1050">
+                <a:solidFill>
+                  <a:schemeClr val="accent1"/>
+                </a:solidFill>
+                <a:latin typeface="+mn-ea"/>
+              </a:endParaRPr>
+            </a:p>
+          </p:txBody>
+        </p:sp>
+        <p:sp>
+          <p:nvSpPr>
+            <p:cNvPr id="19" name="フリーフォーム: 図形 78">
+              <a:extLst>
+                <a:ext uri="{FF2B5EF4-FFF2-40B4-BE49-F238E27FC236}">
+                  <a16:creationId xmlns:a16="http://schemas.microsoft.com/office/drawing/2014/main" id="{593AEB67-B5EF-7360-94A8-312FB7488AD3}"/>
+                </a:ext>
+              </a:extLst>
+            </p:cNvPr>
+            <p:cNvSpPr/>
+            <p:nvPr/>
+          </p:nvSpPr>
+          <p:spPr>
+            <a:xfrm>
+              <a:off x="4460891" y="2083896"/>
+              <a:ext cx="0" cy="845361"/>
+            </a:xfrm>
+            <a:custGeom>
+              <a:avLst/>
+              <a:gdLst>
+                <a:gd name="connsiteX0" fmla="*/ 0 w 6129"/>
+                <a:gd name="connsiteY0" fmla="*/ 0 h 673578"/>
+                <a:gd name="connsiteX1" fmla="*/ 0 w 6129"/>
+                <a:gd name="connsiteY1" fmla="*/ 673578 h 673578"/>
+              </a:gdLst>
+              <a:ahLst/>
+              <a:cxnLst>
+                <a:cxn ang="0">
+                  <a:pos x="connsiteX0" y="connsiteY0"/>
+                </a:cxn>
+                <a:cxn ang="0">
+                  <a:pos x="connsiteX1" y="connsiteY1"/>
+                </a:cxn>
+              </a:cxnLst>
+              <a:rect l="l" t="t" r="r" b="b"/>
+              <a:pathLst>
+                <a:path w="6129" h="673578">
+                  <a:moveTo>
+                    <a:pt x="0" y="0"/>
+                  </a:moveTo>
+                  <a:lnTo>
+                    <a:pt x="0" y="673578"/>
+                  </a:lnTo>
+                </a:path>
+              </a:pathLst>
+            </a:custGeom>
+            <a:noFill/>
+            <a:ln w="18358" cap="flat">
+              <a:solidFill>
+                <a:srgbClr val="36393D">
+                  <a:alpha val="30000"/>
+                </a:srgbClr>
+              </a:solidFill>
+              <a:prstDash val="solid"/>
+              <a:miter/>
+              <a:tailEnd type="stealth" w="lg" len="lg"/>
+            </a:ln>
+          </p:spPr>
+          <p:txBody>
+            <a:bodyPr rot="0" spcFirstLastPara="0" vert="horz" wrap="square" lIns="105601" tIns="52800" rIns="105601" bIns="52800" numCol="1" spcCol="0" rtlCol="0" fromWordArt="0" anchor="ctr" anchorCtr="0" forceAA="0" compatLnSpc="1">
+              <a:prstTxWarp prst="textNoShape">
+                <a:avLst/>
+              </a:prstTxWarp>
+              <a:noAutofit/>
+            </a:bodyPr>
+            <a:lstStyle/>
+            <a:p>
+              <a:endParaRPr lang="ja-JP" altLang="en-US" sz="2079"/>
+            </a:p>
+          </p:txBody>
+        </p:sp>
+        <p:sp>
+          <p:nvSpPr>
+            <p:cNvPr id="21" name="テキスト ボックス 20">
+              <a:extLst>
+                <a:ext uri="{FF2B5EF4-FFF2-40B4-BE49-F238E27FC236}">
+                  <a16:creationId xmlns:a16="http://schemas.microsoft.com/office/drawing/2014/main" id="{1BEC8CC1-9CB7-F395-AAA4-086AFC3515E4}"/>
+                </a:ext>
+              </a:extLst>
+            </p:cNvPr>
+            <p:cNvSpPr txBox="1"/>
+            <p:nvPr/>
+          </p:nvSpPr>
+          <p:spPr>
+            <a:xfrm>
+              <a:off x="4460890" y="2153384"/>
+              <a:ext cx="2273660" cy="577081"/>
+            </a:xfrm>
+            <a:prstGeom prst="rect">
+              <a:avLst/>
+            </a:prstGeom>
+            <a:noFill/>
+          </p:spPr>
+          <p:txBody>
+            <a:bodyPr wrap="square">
+              <a:spAutoFit/>
+            </a:bodyPr>
+            <a:lstStyle/>
+            <a:p>
+              <a:pPr>
+                <a:buNone/>
+              </a:pPr>
+              <a:r>
+                <a:rPr lang="en" altLang="ja-JP" sz="1050" dirty="0">
+                  <a:latin typeface="+mn-ea"/>
+                </a:rPr>
+                <a:t>Only the UC (start-up/shutdown) schedule is inherited</a:t>
+              </a:r>
+            </a:p>
+            <a:p>
+              <a:pPr>
+                <a:buNone/>
+              </a:pPr>
+              <a:r>
+                <a:rPr lang="en" altLang="ja-JP" sz="1050" dirty="0">
+                  <a:latin typeface="+mn-ea"/>
+                </a:rPr>
+                <a:t>(secured </a:t>
+              </a:r>
+              <a:r>
+                <a:rPr lang="el-GR" altLang="ja-JP" sz="1050" dirty="0">
+                  <a:latin typeface="+mn-ea"/>
+                </a:rPr>
+                <a:t>Δ</a:t>
+              </a:r>
+              <a:r>
+                <a:rPr lang="en" altLang="ja-JP" sz="1050" dirty="0">
+                  <a:latin typeface="+mn-ea"/>
+                </a:rPr>
+                <a:t>kW is not inherited)</a:t>
+              </a:r>
+              <a:endParaRPr lang="ja-JP" altLang="ja-JP" sz="1050">
+                <a:latin typeface="+mn-ea"/>
+              </a:endParaRPr>
+            </a:p>
+          </p:txBody>
+        </p:sp>
+        <p:sp>
+          <p:nvSpPr>
+            <p:cNvPr id="22" name="フリーフォーム: 図形 78">
+              <a:extLst>
+                <a:ext uri="{FF2B5EF4-FFF2-40B4-BE49-F238E27FC236}">
+                  <a16:creationId xmlns:a16="http://schemas.microsoft.com/office/drawing/2014/main" id="{DE7B3A4B-8790-6F76-3ECB-725B0E9EBD09}"/>
+                </a:ext>
+              </a:extLst>
+            </p:cNvPr>
+            <p:cNvSpPr/>
+            <p:nvPr/>
+          </p:nvSpPr>
+          <p:spPr>
+            <a:xfrm>
+              <a:off x="7326996" y="2020769"/>
+              <a:ext cx="0" cy="845361"/>
+            </a:xfrm>
+            <a:custGeom>
+              <a:avLst/>
+              <a:gdLst>
+                <a:gd name="connsiteX0" fmla="*/ 0 w 6129"/>
+                <a:gd name="connsiteY0" fmla="*/ 0 h 673578"/>
+                <a:gd name="connsiteX1" fmla="*/ 0 w 6129"/>
+                <a:gd name="connsiteY1" fmla="*/ 673578 h 673578"/>
+              </a:gdLst>
+              <a:ahLst/>
+              <a:cxnLst>
+                <a:cxn ang="0">
+                  <a:pos x="connsiteX0" y="connsiteY0"/>
+                </a:cxn>
+                <a:cxn ang="0">
+                  <a:pos x="connsiteX1" y="connsiteY1"/>
+                </a:cxn>
+              </a:cxnLst>
+              <a:rect l="l" t="t" r="r" b="b"/>
+              <a:pathLst>
+                <a:path w="6129" h="673578">
+                  <a:moveTo>
+                    <a:pt x="0" y="0"/>
+                  </a:moveTo>
+                  <a:lnTo>
+                    <a:pt x="0" y="673578"/>
+                  </a:lnTo>
+                </a:path>
+              </a:pathLst>
+            </a:custGeom>
+            <a:noFill/>
+            <a:ln w="18358" cap="flat">
+              <a:solidFill>
+                <a:srgbClr val="C00000">
+                  <a:alpha val="30000"/>
+                </a:srgbClr>
+              </a:solidFill>
+              <a:prstDash val="solid"/>
+              <a:miter/>
+              <a:tailEnd type="stealth" w="lg" len="lg"/>
+            </a:ln>
+          </p:spPr>
+          <p:txBody>
+            <a:bodyPr rot="0" spcFirstLastPara="0" vert="horz" wrap="square" lIns="105601" tIns="52800" rIns="105601" bIns="52800" numCol="1" spcCol="0" rtlCol="0" fromWordArt="0" anchor="ctr" anchorCtr="0" forceAA="0" compatLnSpc="1">
+              <a:prstTxWarp prst="textNoShape">
+                <a:avLst/>
+              </a:prstTxWarp>
+              <a:noAutofit/>
+            </a:bodyPr>
+            <a:lstStyle/>
+            <a:p>
+              <a:endParaRPr lang="ja-JP" altLang="en-US" sz="2079"/>
+            </a:p>
+          </p:txBody>
+        </p:sp>
+        <p:sp>
+          <p:nvSpPr>
+            <p:cNvPr id="23" name="テキスト ボックス 22">
+              <a:extLst>
+                <a:ext uri="{FF2B5EF4-FFF2-40B4-BE49-F238E27FC236}">
+                  <a16:creationId xmlns:a16="http://schemas.microsoft.com/office/drawing/2014/main" id="{937B0AF3-DA78-49E4-2E72-97E939629FCE}"/>
+                </a:ext>
+              </a:extLst>
+            </p:cNvPr>
+            <p:cNvSpPr txBox="1"/>
+            <p:nvPr/>
+          </p:nvSpPr>
+          <p:spPr>
+            <a:xfrm>
+              <a:off x="7326996" y="2125852"/>
+              <a:ext cx="2572093" cy="577081"/>
+            </a:xfrm>
+            <a:prstGeom prst="rect">
+              <a:avLst/>
+            </a:prstGeom>
+            <a:noFill/>
+          </p:spPr>
+          <p:txBody>
+            <a:bodyPr wrap="square">
+              <a:spAutoFit/>
+            </a:bodyPr>
+            <a:lstStyle/>
+            <a:p>
+              <a:r>
+                <a:rPr lang="en" altLang="ja-JP" sz="1050" b="1" dirty="0">
+                  <a:solidFill>
+                    <a:srgbClr val="C00000"/>
+                  </a:solidFill>
+                  <a:latin typeface="+mn-ea"/>
+                </a:rPr>
+                <a:t>The </a:t>
+              </a:r>
+              <a:r>
+                <a:rPr lang="el-GR" altLang="ja-JP" sz="1050" b="1" dirty="0">
+                  <a:solidFill>
+                    <a:srgbClr val="C00000"/>
+                  </a:solidFill>
+                  <a:latin typeface="+mn-ea"/>
+                </a:rPr>
+                <a:t>Δ</a:t>
+              </a:r>
+              <a:r>
+                <a:rPr lang="en" altLang="ja-JP" sz="1050" b="1" dirty="0">
+                  <a:solidFill>
+                    <a:srgbClr val="C00000"/>
+                  </a:solidFill>
+                  <a:latin typeface="+mn-ea"/>
+                </a:rPr>
+                <a:t>kW secured in day-ahead scheduling is inherited into intra-day scheduling</a:t>
+              </a:r>
+              <a:endParaRPr lang="ja-JP" altLang="ja-JP" sz="1050">
+                <a:solidFill>
+                  <a:srgbClr val="C00000"/>
+                </a:solidFill>
+                <a:latin typeface="+mn-ea"/>
+              </a:endParaRPr>
+            </a:p>
+          </p:txBody>
+        </p:sp>
+      </p:grpSp>
+    </p:spTree>
+    <p:extLst>
+      <p:ext uri="{BB962C8B-B14F-4D97-AF65-F5344CB8AC3E}">
+        <p14:creationId xmlns:p14="http://schemas.microsoft.com/office/powerpoint/2010/main" val="826032537"/>
       </p:ext>
     </p:extLst>
   </p:cSld>
@@ -16973,4 +18370,319 @@
     </a:ext>
   </a:extLst>
 </a:theme>
+</file>
+
+<file path=ppt/theme/theme2.xml><?xml version="1.0" encoding="utf-8"?>
+<a:theme xmlns:a="http://schemas.openxmlformats.org/drawingml/2006/main" name="Office テーマ">
+  <a:themeElements>
+    <a:clrScheme name="Office">
+      <a:dk1>
+        <a:sysClr val="windowText" lastClr="000000"/>
+      </a:dk1>
+      <a:lt1>
+        <a:sysClr val="window" lastClr="FFFFFF"/>
+      </a:lt1>
+      <a:dk2>
+        <a:srgbClr val="0E2841"/>
+      </a:dk2>
+      <a:lt2>
+        <a:srgbClr val="E8E8E8"/>
+      </a:lt2>
+      <a:accent1>
+        <a:srgbClr val="156082"/>
+      </a:accent1>
+      <a:accent2>
+        <a:srgbClr val="E97132"/>
+      </a:accent2>
+      <a:accent3>
+        <a:srgbClr val="196B24"/>
+      </a:accent3>
+      <a:accent4>
+        <a:srgbClr val="0F9ED5"/>
+      </a:accent4>
+      <a:accent5>
+        <a:srgbClr val="A02B93"/>
+      </a:accent5>
+      <a:accent6>
+        <a:srgbClr val="4EA72E"/>
+      </a:accent6>
+      <a:hlink>
+        <a:srgbClr val="467886"/>
+      </a:hlink>
+      <a:folHlink>
+        <a:srgbClr val="96607D"/>
+      </a:folHlink>
+    </a:clrScheme>
+    <a:fontScheme name="Office">
+      <a:majorFont>
+        <a:latin typeface="游ゴシック Light" panose="02110004020202020204"/>
+        <a:ea typeface=""/>
+        <a:cs typeface=""/>
+        <a:font script="Jpan" typeface="游ゴシック Light"/>
+        <a:font script="Hang" typeface="맑은 고딕"/>
+        <a:font script="Hans" typeface="等线 Light"/>
+        <a:font script="Hant" typeface="新細明體"/>
+        <a:font script="Arab" typeface="Times New Roman"/>
+        <a:font script="Hebr" typeface="Times New Roman"/>
+        <a:font script="Thai" typeface="Angsana New"/>
+        <a:font script="Ethi" typeface="Nyala"/>
+        <a:font script="Beng" typeface="Vrinda"/>
+        <a:font script="Gujr" typeface="Shruti"/>
+        <a:font script="Khmr" typeface="MoolBoran"/>
+        <a:font script="Knda" typeface="Tunga"/>
+        <a:font script="Guru" typeface="Raavi"/>
+        <a:font script="Cans" typeface="Euphemia"/>
+        <a:font script="Cher" typeface="Plantagenet Cherokee"/>
+        <a:font script="Yiii" typeface="Microsoft Yi Baiti"/>
+        <a:font script="Tibt" typeface="Microsoft Himalaya"/>
+        <a:font script="Thaa" typeface="MV Boli"/>
+        <a:font script="Deva" typeface="Mangal"/>
+        <a:font script="Telu" typeface="Gautami"/>
+        <a:font script="Taml" typeface="Latha"/>
+        <a:font script="Syrc" typeface="Estrangelo Edessa"/>
+        <a:font script="Orya" typeface="Kalinga"/>
+        <a:font script="Mlym" typeface="Kartika"/>
+        <a:font script="Laoo" typeface="DokChampa"/>
+        <a:font script="Sinh" typeface="Iskoola Pota"/>
+        <a:font script="Mong" typeface="Mongolian Baiti"/>
+        <a:font script="Viet" typeface="Times New Roman"/>
+        <a:font script="Uigh" typeface="Microsoft Uighur"/>
+        <a:font script="Geor" typeface="Sylfaen"/>
+        <a:font script="Armn" typeface="Arial"/>
+        <a:font script="Bugi" typeface="Leelawadee UI"/>
+        <a:font script="Bopo" typeface="Microsoft JhengHei"/>
+        <a:font script="Java" typeface="Javanese Text"/>
+        <a:font script="Lisu" typeface="Segoe UI"/>
+        <a:font script="Mymr" typeface="Myanmar Text"/>
+        <a:font script="Nkoo" typeface="Ebrima"/>
+        <a:font script="Olck" typeface="Nirmala UI"/>
+        <a:font script="Osma" typeface="Ebrima"/>
+        <a:font script="Phag" typeface="Phagspa"/>
+        <a:font script="Syrn" typeface="Estrangelo Edessa"/>
+        <a:font script="Syrj" typeface="Estrangelo Edessa"/>
+        <a:font script="Syre" typeface="Estrangelo Edessa"/>
+        <a:font script="Sora" typeface="Nirmala UI"/>
+        <a:font script="Tale" typeface="Microsoft Tai Le"/>
+        <a:font script="Talu" typeface="Microsoft New Tai Lue"/>
+        <a:font script="Tfng" typeface="Ebrima"/>
+      </a:majorFont>
+      <a:minorFont>
+        <a:latin typeface="游ゴシック" panose="02110004020202020204"/>
+        <a:ea typeface=""/>
+        <a:cs typeface=""/>
+        <a:font script="Jpan" typeface="游ゴシック"/>
+        <a:font script="Hang" typeface="맑은 고딕"/>
+        <a:font script="Hans" typeface="等线"/>
+        <a:font script="Hant" typeface="新細明體"/>
+        <a:font script="Arab" typeface="Arial"/>
+        <a:font script="Hebr" typeface="Arial"/>
+        <a:font script="Thai" typeface="Cordia New"/>
+        <a:font script="Ethi" typeface="Nyala"/>
+        <a:font script="Beng" typeface="Vrinda"/>
+        <a:font script="Gujr" typeface="Shruti"/>
+        <a:font script="Khmr" typeface="DaunPenh"/>
+        <a:font script="Knda" typeface="Tunga"/>
+        <a:font script="Guru" typeface="Raavi"/>
+        <a:font script="Cans" typeface="Euphemia"/>
+        <a:font script="Cher" typeface="Plantagenet Cherokee"/>
+        <a:font script="Yiii" typeface="Microsoft Yi Baiti"/>
+        <a:font script="Tibt" typeface="Microsoft Himalaya"/>
+        <a:font script="Thaa" typeface="MV Boli"/>
+        <a:font script="Deva" typeface="Mangal"/>
+        <a:font script="Telu" typeface="Gautami"/>
+        <a:font script="Taml" typeface="Latha"/>
+        <a:font script="Syrc" typeface="Estrangelo Edessa"/>
+        <a:font script="Orya" typeface="Kalinga"/>
+        <a:font script="Mlym" typeface="Kartika"/>
+        <a:font script="Laoo" typeface="DokChampa"/>
+        <a:font script="Sinh" typeface="Iskoola Pota"/>
+        <a:font script="Mong" typeface="Mongolian Baiti"/>
+        <a:font script="Viet" typeface="Arial"/>
+        <a:font script="Uigh" typeface="Microsoft Uighur"/>
+        <a:font script="Geor" typeface="Sylfaen"/>
+        <a:font script="Armn" typeface="Arial"/>
+        <a:font script="Bugi" typeface="Leelawadee UI"/>
+        <a:font script="Bopo" typeface="Microsoft JhengHei"/>
+        <a:font script="Java" typeface="Javanese Text"/>
+        <a:font script="Lisu" typeface="Segoe UI"/>
+        <a:font script="Mymr" typeface="Myanmar Text"/>
+        <a:font script="Nkoo" typeface="Ebrima"/>
+        <a:font script="Olck" typeface="Nirmala UI"/>
+        <a:font script="Osma" typeface="Ebrima"/>
+        <a:font script="Phag" typeface="Phagspa"/>
+        <a:font script="Syrn" typeface="Estrangelo Edessa"/>
+        <a:font script="Syrj" typeface="Estrangelo Edessa"/>
+        <a:font script="Syre" typeface="Estrangelo Edessa"/>
+        <a:font script="Sora" typeface="Nirmala UI"/>
+        <a:font script="Tale" typeface="Microsoft Tai Le"/>
+        <a:font script="Talu" typeface="Microsoft New Tai Lue"/>
+        <a:font script="Tfng" typeface="Ebrima"/>
+      </a:minorFont>
+    </a:fontScheme>
+    <a:fmtScheme name="Office">
+      <a:fillStyleLst>
+        <a:solidFill>
+          <a:schemeClr val="phClr"/>
+        </a:solidFill>
+        <a:gradFill rotWithShape="1">
+          <a:gsLst>
+            <a:gs pos="0">
+              <a:schemeClr val="phClr">
+                <a:lumMod val="110000"/>
+                <a:satMod val="105000"/>
+                <a:tint val="67000"/>
+              </a:schemeClr>
+            </a:gs>
+            <a:gs pos="50000">
+              <a:schemeClr val="phClr">
+                <a:lumMod val="105000"/>
+                <a:satMod val="103000"/>
+                <a:tint val="73000"/>
+              </a:schemeClr>
+            </a:gs>
+            <a:gs pos="100000">
+              <a:schemeClr val="phClr">
+                <a:lumMod val="105000"/>
+                <a:satMod val="109000"/>
+                <a:tint val="81000"/>
+              </a:schemeClr>
+            </a:gs>
+          </a:gsLst>
+          <a:lin ang="5400000" scaled="0"/>
+        </a:gradFill>
+        <a:gradFill rotWithShape="1">
+          <a:gsLst>
+            <a:gs pos="0">
+              <a:schemeClr val="phClr">
+                <a:satMod val="103000"/>
+                <a:lumMod val="102000"/>
+                <a:tint val="94000"/>
+              </a:schemeClr>
+            </a:gs>
+            <a:gs pos="50000">
+              <a:schemeClr val="phClr">
+                <a:satMod val="110000"/>
+                <a:lumMod val="100000"/>
+                <a:shade val="100000"/>
+              </a:schemeClr>
+            </a:gs>
+            <a:gs pos="100000">
+              <a:schemeClr val="phClr">
+                <a:lumMod val="99000"/>
+                <a:satMod val="120000"/>
+                <a:shade val="78000"/>
+              </a:schemeClr>
+            </a:gs>
+          </a:gsLst>
+          <a:lin ang="5400000" scaled="0"/>
+        </a:gradFill>
+      </a:fillStyleLst>
+      <a:lnStyleLst>
+        <a:ln w="12700" cap="flat" cmpd="sng" algn="ctr">
+          <a:solidFill>
+            <a:schemeClr val="phClr"/>
+          </a:solidFill>
+          <a:prstDash val="solid"/>
+          <a:miter lim="800000"/>
+        </a:ln>
+        <a:ln w="19050" cap="flat" cmpd="sng" algn="ctr">
+          <a:solidFill>
+            <a:schemeClr val="phClr"/>
+          </a:solidFill>
+          <a:prstDash val="solid"/>
+          <a:miter lim="800000"/>
+        </a:ln>
+        <a:ln w="25400" cap="flat" cmpd="sng" algn="ctr">
+          <a:solidFill>
+            <a:schemeClr val="phClr"/>
+          </a:solidFill>
+          <a:prstDash val="solid"/>
+          <a:miter lim="800000"/>
+        </a:ln>
+      </a:lnStyleLst>
+      <a:effectStyleLst>
+        <a:effectStyle>
+          <a:effectLst/>
+        </a:effectStyle>
+        <a:effectStyle>
+          <a:effectLst/>
+        </a:effectStyle>
+        <a:effectStyle>
+          <a:effectLst>
+            <a:outerShdw blurRad="57150" dist="19050" dir="5400000" algn="ctr" rotWithShape="0">
+              <a:srgbClr val="000000">
+                <a:alpha val="63000"/>
+              </a:srgbClr>
+            </a:outerShdw>
+          </a:effectLst>
+        </a:effectStyle>
+      </a:effectStyleLst>
+      <a:bgFillStyleLst>
+        <a:solidFill>
+          <a:schemeClr val="phClr"/>
+        </a:solidFill>
+        <a:solidFill>
+          <a:schemeClr val="phClr">
+            <a:tint val="95000"/>
+            <a:satMod val="170000"/>
+          </a:schemeClr>
+        </a:solidFill>
+        <a:gradFill rotWithShape="1">
+          <a:gsLst>
+            <a:gs pos="0">
+              <a:schemeClr val="phClr">
+                <a:tint val="93000"/>
+                <a:satMod val="150000"/>
+                <a:shade val="98000"/>
+                <a:lumMod val="102000"/>
+              </a:schemeClr>
+            </a:gs>
+            <a:gs pos="50000">
+              <a:schemeClr val="phClr">
+                <a:tint val="98000"/>
+                <a:satMod val="130000"/>
+                <a:shade val="90000"/>
+                <a:lumMod val="103000"/>
+              </a:schemeClr>
+            </a:gs>
+            <a:gs pos="100000">
+              <a:schemeClr val="phClr">
+                <a:shade val="63000"/>
+                <a:satMod val="120000"/>
+              </a:schemeClr>
+            </a:gs>
+          </a:gsLst>
+          <a:lin ang="5400000" scaled="0"/>
+        </a:gradFill>
+      </a:bgFillStyleLst>
+    </a:fmtScheme>
+  </a:themeElements>
+  <a:objectDefaults>
+    <a:lnDef>
+      <a:spPr/>
+      <a:bodyPr/>
+      <a:lstStyle/>
+      <a:style>
+        <a:lnRef idx="2">
+          <a:schemeClr val="accent1"/>
+        </a:lnRef>
+        <a:fillRef idx="0">
+          <a:schemeClr val="accent1"/>
+        </a:fillRef>
+        <a:effectRef idx="1">
+          <a:schemeClr val="accent1"/>
+        </a:effectRef>
+        <a:fontRef idx="minor">
+          <a:schemeClr val="tx1"/>
+        </a:fontRef>
+      </a:style>
+    </a:lnDef>
+  </a:objectDefaults>
+  <a:extraClrSchemeLst/>
+  <a:extLst>
+    <a:ext uri="{05A4C25C-085E-4340-85A3-A5531E510DB2}">
+      <thm15:themeFamily xmlns:thm15="http://schemas.microsoft.com/office/thememl/2012/main" name="Office Theme" id="{2E142A2C-CD16-42D6-873A-C26D2A0506FA}" vid="{1BDDFF52-6CD6-40A5-AB3C-68EB2F1E4D0A}"/>
+    </a:ext>
+  </a:extLst>
+</a:theme>
 </file>